--- a/DD and Twirling for Dynamic Circuits.pptx
+++ b/DD and Twirling for Dynamic Circuits.pptx
@@ -7,6 +7,13 @@
   <p:sldIdLst>
     <p:sldId id="256" r:id="rId2"/>
     <p:sldId id="257" r:id="rId3"/>
+    <p:sldId id="258" r:id="rId4"/>
+    <p:sldId id="259" r:id="rId5"/>
+    <p:sldId id="260" r:id="rId6"/>
+    <p:sldId id="261" r:id="rId7"/>
+    <p:sldId id="262" r:id="rId8"/>
+    <p:sldId id="263" r:id="rId9"/>
+    <p:sldId id="264" r:id="rId10"/>
   </p:sldIdLst>
   <p:sldSz cx="12192000" cy="6858000"/>
   <p:notesSz cx="6858000" cy="9144000"/>
@@ -105,7 +112,20 @@
       </a:defRPr>
     </a:lvl9pPr>
   </p:defaultTextStyle>
+  <p:extLst>
+    <p:ext uri="{EFAFB233-063F-42B5-8137-9DF3F51BA10A}">
+      <p15:sldGuideLst xmlns:p15="http://schemas.microsoft.com/office/powerpoint/2012/main"/>
+    </p:ext>
+  </p:extLst>
 </p:presentation>
+</file>
+
+<file path=ppt/revisionInfo.xml><?xml version="1.0" encoding="utf-8"?>
+<p1510:revInfo xmlns:a="http://schemas.openxmlformats.org/drawingml/2006/main" xmlns:r="http://schemas.openxmlformats.org/officeDocument/2006/relationships" xmlns:p1510="http://schemas.microsoft.com/office/powerpoint/2015/10/main">
+  <p1510:revLst>
+    <p1510:client id="{F2AE90CA-C906-4A48-9B7E-B4DD7FEBCE38}" v="38" dt="2026-02-02T12:17:42.629"/>
+  </p1510:revLst>
+</p1510:revInfo>
 </file>
 
 <file path=ppt/slideLayouts/slideLayout1.xml><?xml version="1.0" encoding="utf-8"?>
@@ -3359,13 +3379,20 @@
             <p:ph type="ctrTitle"/>
           </p:nvPr>
         </p:nvSpPr>
-        <p:spPr/>
-        <p:txBody>
-          <a:bodyPr/>
-          <a:lstStyle/>
-          <a:p>
-            <a:r>
-              <a:rPr lang="en-IN" dirty="0"/>
+        <p:spPr>
+          <a:xfrm>
+            <a:off x="1524000" y="2235200"/>
+            <a:ext cx="9144000" cy="2387600"/>
+          </a:xfrm>
+        </p:spPr>
+        <p:txBody>
+          <a:bodyPr>
+            <a:normAutofit fontScale="90000"/>
+          </a:bodyPr>
+          <a:lstStyle/>
+          <a:p>
+            <a:r>
+              <a:rPr lang="en-IN" sz="8800" dirty="0"/>
               <a:t>DD and Twirling for Dynamic Circuits</a:t>
             </a:r>
           </a:p>
@@ -3401,10 +3428,1906 @@
           <a:chExt cx="0" cy="0"/>
         </a:xfrm>
       </p:grpSpPr>
+      <p:sp>
+        <p:nvSpPr>
+          <p:cNvPr id="2" name="Title 1">
+            <a:extLst>
+              <a:ext uri="{FF2B5EF4-FFF2-40B4-BE49-F238E27FC236}">
+                <a16:creationId xmlns:a16="http://schemas.microsoft.com/office/drawing/2014/main" id="{90AAA3C4-913D-32B6-6BC0-533F61D82859}"/>
+              </a:ext>
+            </a:extLst>
+          </p:cNvPr>
+          <p:cNvSpPr txBox="1">
+            <a:spLocks/>
+          </p:cNvSpPr>
+          <p:nvPr/>
+        </p:nvSpPr>
+        <p:spPr>
+          <a:xfrm>
+            <a:off x="148105" y="64391"/>
+            <a:ext cx="9144000" cy="674240"/>
+          </a:xfrm>
+          <a:prstGeom prst="rect">
+            <a:avLst/>
+          </a:prstGeom>
+        </p:spPr>
+        <p:txBody>
+          <a:bodyPr/>
+          <a:lstStyle>
+            <a:lvl1pPr algn="l" defTabSz="914400" rtl="0" eaLnBrk="1" latinLnBrk="0" hangingPunct="1">
+              <a:lnSpc>
+                <a:spcPct val="90000"/>
+              </a:lnSpc>
+              <a:spcBef>
+                <a:spcPct val="0"/>
+              </a:spcBef>
+              <a:buNone/>
+              <a:defRPr sz="4400" kern="1200">
+                <a:solidFill>
+                  <a:schemeClr val="tx1"/>
+                </a:solidFill>
+                <a:latin typeface="+mj-lt"/>
+                <a:ea typeface="+mj-ea"/>
+                <a:cs typeface="+mj-cs"/>
+              </a:defRPr>
+            </a:lvl1pPr>
+          </a:lstStyle>
+          <a:p>
+            <a:r>
+              <a:rPr lang="en-IN" sz="3200" dirty="0"/>
+              <a:t>1. Split QC </a:t>
+            </a:r>
+          </a:p>
+        </p:txBody>
+      </p:sp>
+      <p:pic>
+        <p:nvPicPr>
+          <p:cNvPr id="4" name="Picture 3" descr="A diagram of a diagram&#10;&#10;AI-generated content may be incorrect.">
+            <a:extLst>
+              <a:ext uri="{FF2B5EF4-FFF2-40B4-BE49-F238E27FC236}">
+                <a16:creationId xmlns:a16="http://schemas.microsoft.com/office/drawing/2014/main" id="{7FE55DE3-DF9D-4BC9-C4BB-CCFD0DE6BFD8}"/>
+              </a:ext>
+            </a:extLst>
+          </p:cNvPr>
+          <p:cNvPicPr>
+            <a:picLocks noChangeAspect="1"/>
+          </p:cNvPicPr>
+          <p:nvPr/>
+        </p:nvPicPr>
+        <p:blipFill>
+          <a:blip r:embed="rId2"/>
+          <a:stretch>
+            <a:fillRect/>
+          </a:stretch>
+        </p:blipFill>
+        <p:spPr>
+          <a:xfrm>
+            <a:off x="1063277" y="670318"/>
+            <a:ext cx="10065445" cy="2758682"/>
+          </a:xfrm>
+          <a:prstGeom prst="rect">
+            <a:avLst/>
+          </a:prstGeom>
+        </p:spPr>
+      </p:pic>
+      <p:pic>
+        <p:nvPicPr>
+          <p:cNvPr id="6" name="Picture 5" descr="A diagram of a stitching scheme&#10;&#10;AI-generated content may be incorrect.">
+            <a:extLst>
+              <a:ext uri="{FF2B5EF4-FFF2-40B4-BE49-F238E27FC236}">
+                <a16:creationId xmlns:a16="http://schemas.microsoft.com/office/drawing/2014/main" id="{0FAAA536-7DD1-2A0E-4346-F6F333522D02}"/>
+              </a:ext>
+            </a:extLst>
+          </p:cNvPr>
+          <p:cNvPicPr>
+            <a:picLocks noChangeAspect="1"/>
+          </p:cNvPicPr>
+          <p:nvPr/>
+        </p:nvPicPr>
+        <p:blipFill>
+          <a:blip r:embed="rId3"/>
+          <a:stretch>
+            <a:fillRect/>
+          </a:stretch>
+        </p:blipFill>
+        <p:spPr>
+          <a:xfrm>
+            <a:off x="319825" y="3709381"/>
+            <a:ext cx="3364734" cy="2710998"/>
+          </a:xfrm>
+          <a:prstGeom prst="rect">
+            <a:avLst/>
+          </a:prstGeom>
+        </p:spPr>
+      </p:pic>
+      <p:pic>
+        <p:nvPicPr>
+          <p:cNvPr id="8" name="Picture 7" descr="A graph with blue squares and red squares&#10;&#10;AI-generated content may be incorrect.">
+            <a:extLst>
+              <a:ext uri="{FF2B5EF4-FFF2-40B4-BE49-F238E27FC236}">
+                <a16:creationId xmlns:a16="http://schemas.microsoft.com/office/drawing/2014/main" id="{A4934D66-166F-B4EB-B9F2-458D71D5CED2}"/>
+              </a:ext>
+            </a:extLst>
+          </p:cNvPr>
+          <p:cNvPicPr>
+            <a:picLocks noChangeAspect="1"/>
+          </p:cNvPicPr>
+          <p:nvPr/>
+        </p:nvPicPr>
+        <p:blipFill>
+          <a:blip r:embed="rId4"/>
+          <a:stretch>
+            <a:fillRect/>
+          </a:stretch>
+        </p:blipFill>
+        <p:spPr>
+          <a:xfrm>
+            <a:off x="3910676" y="3709381"/>
+            <a:ext cx="3867689" cy="2710998"/>
+          </a:xfrm>
+          <a:prstGeom prst="rect">
+            <a:avLst/>
+          </a:prstGeom>
+        </p:spPr>
+      </p:pic>
+      <p:pic>
+        <p:nvPicPr>
+          <p:cNvPr id="10" name="Picture 9" descr="A graph of a graph&#10;&#10;AI-generated content may be incorrect.">
+            <a:extLst>
+              <a:ext uri="{FF2B5EF4-FFF2-40B4-BE49-F238E27FC236}">
+                <a16:creationId xmlns:a16="http://schemas.microsoft.com/office/drawing/2014/main" id="{4BAA5302-1DBC-2591-421C-7FD5093F7865}"/>
+              </a:ext>
+            </a:extLst>
+          </p:cNvPr>
+          <p:cNvPicPr>
+            <a:picLocks noChangeAspect="1"/>
+          </p:cNvPicPr>
+          <p:nvPr/>
+        </p:nvPicPr>
+        <p:blipFill>
+          <a:blip r:embed="rId5"/>
+          <a:stretch>
+            <a:fillRect/>
+          </a:stretch>
+        </p:blipFill>
+        <p:spPr>
+          <a:xfrm>
+            <a:off x="8004484" y="3709381"/>
+            <a:ext cx="3867690" cy="2710998"/>
+          </a:xfrm>
+          <a:prstGeom prst="rect">
+            <a:avLst/>
+          </a:prstGeom>
+        </p:spPr>
+      </p:pic>
+      <p:cxnSp>
+        <p:nvCxnSpPr>
+          <p:cNvPr id="19" name="Straight Arrow Connector 18">
+            <a:extLst>
+              <a:ext uri="{FF2B5EF4-FFF2-40B4-BE49-F238E27FC236}">
+                <a16:creationId xmlns:a16="http://schemas.microsoft.com/office/drawing/2014/main" id="{4F137ED9-CC1F-98D1-C129-B90D0C1FD880}"/>
+              </a:ext>
+            </a:extLst>
+          </p:cNvPr>
+          <p:cNvCxnSpPr>
+            <a:cxnSpLocks/>
+          </p:cNvCxnSpPr>
+          <p:nvPr/>
+        </p:nvCxnSpPr>
+        <p:spPr>
+          <a:xfrm flipH="1">
+            <a:off x="2788276" y="3389482"/>
+            <a:ext cx="3261465" cy="429365"/>
+          </a:xfrm>
+          <a:prstGeom prst="straightConnector1">
+            <a:avLst/>
+          </a:prstGeom>
+          <a:ln w="28575">
+            <a:tailEnd type="triangle"/>
+          </a:ln>
+        </p:spPr>
+        <p:style>
+          <a:lnRef idx="2">
+            <a:schemeClr val="dk1"/>
+          </a:lnRef>
+          <a:fillRef idx="0">
+            <a:schemeClr val="dk1"/>
+          </a:fillRef>
+          <a:effectRef idx="1">
+            <a:schemeClr val="dk1"/>
+          </a:effectRef>
+          <a:fontRef idx="minor">
+            <a:schemeClr val="tx1"/>
+          </a:fontRef>
+        </p:style>
+      </p:cxnSp>
+      <p:cxnSp>
+        <p:nvCxnSpPr>
+          <p:cNvPr id="21" name="Straight Arrow Connector 20">
+            <a:extLst>
+              <a:ext uri="{FF2B5EF4-FFF2-40B4-BE49-F238E27FC236}">
+                <a16:creationId xmlns:a16="http://schemas.microsoft.com/office/drawing/2014/main" id="{1F6601C5-D51B-FF6F-5316-4DD33A3375BF}"/>
+              </a:ext>
+            </a:extLst>
+          </p:cNvPr>
+          <p:cNvCxnSpPr>
+            <a:cxnSpLocks/>
+          </p:cNvCxnSpPr>
+          <p:nvPr/>
+        </p:nvCxnSpPr>
+        <p:spPr>
+          <a:xfrm>
+            <a:off x="6049741" y="3389482"/>
+            <a:ext cx="2933271" cy="429365"/>
+          </a:xfrm>
+          <a:prstGeom prst="straightConnector1">
+            <a:avLst/>
+          </a:prstGeom>
+          <a:ln w="28575">
+            <a:tailEnd type="triangle"/>
+          </a:ln>
+        </p:spPr>
+        <p:style>
+          <a:lnRef idx="2">
+            <a:schemeClr val="dk1"/>
+          </a:lnRef>
+          <a:fillRef idx="0">
+            <a:schemeClr val="dk1"/>
+          </a:fillRef>
+          <a:effectRef idx="1">
+            <a:schemeClr val="dk1"/>
+          </a:effectRef>
+          <a:fontRef idx="minor">
+            <a:schemeClr val="tx1"/>
+          </a:fontRef>
+        </p:style>
+      </p:cxnSp>
+      <p:cxnSp>
+        <p:nvCxnSpPr>
+          <p:cNvPr id="24" name="Straight Arrow Connector 23">
+            <a:extLst>
+              <a:ext uri="{FF2B5EF4-FFF2-40B4-BE49-F238E27FC236}">
+                <a16:creationId xmlns:a16="http://schemas.microsoft.com/office/drawing/2014/main" id="{5078C58C-8130-9BDA-19E1-D5018608D472}"/>
+              </a:ext>
+            </a:extLst>
+          </p:cNvPr>
+          <p:cNvCxnSpPr>
+            <a:cxnSpLocks/>
+          </p:cNvCxnSpPr>
+          <p:nvPr/>
+        </p:nvCxnSpPr>
+        <p:spPr>
+          <a:xfrm flipH="1">
+            <a:off x="6049741" y="3389482"/>
+            <a:ext cx="1" cy="429365"/>
+          </a:xfrm>
+          <a:prstGeom prst="straightConnector1">
+            <a:avLst/>
+          </a:prstGeom>
+          <a:ln w="28575">
+            <a:tailEnd type="triangle"/>
+          </a:ln>
+        </p:spPr>
+        <p:style>
+          <a:lnRef idx="2">
+            <a:schemeClr val="dk1"/>
+          </a:lnRef>
+          <a:fillRef idx="0">
+            <a:schemeClr val="dk1"/>
+          </a:fillRef>
+          <a:effectRef idx="1">
+            <a:schemeClr val="dk1"/>
+          </a:effectRef>
+          <a:fontRef idx="minor">
+            <a:schemeClr val="tx1"/>
+          </a:fontRef>
+        </p:style>
+      </p:cxnSp>
+      <p:sp>
+        <p:nvSpPr>
+          <p:cNvPr id="25" name="TextBox 24">
+            <a:extLst>
+              <a:ext uri="{FF2B5EF4-FFF2-40B4-BE49-F238E27FC236}">
+                <a16:creationId xmlns:a16="http://schemas.microsoft.com/office/drawing/2014/main" id="{0CAE3D42-3DAA-FD5A-7BA5-2132DA98EFA1}"/>
+              </a:ext>
+            </a:extLst>
+          </p:cNvPr>
+          <p:cNvSpPr txBox="1"/>
+          <p:nvPr/>
+        </p:nvSpPr>
+        <p:spPr>
+          <a:xfrm>
+            <a:off x="569363" y="6324538"/>
+            <a:ext cx="2865658" cy="369332"/>
+          </a:xfrm>
+          <a:prstGeom prst="rect">
+            <a:avLst/>
+          </a:prstGeom>
+          <a:noFill/>
+        </p:spPr>
+        <p:txBody>
+          <a:bodyPr wrap="square" rtlCol="0">
+            <a:spAutoFit/>
+          </a:bodyPr>
+          <a:lstStyle/>
+          <a:p>
+            <a:pPr algn="ctr"/>
+            <a:r>
+              <a:rPr lang="en-US" dirty="0"/>
+              <a:t>Circuit: </a:t>
+            </a:r>
+            <a:r>
+              <a:rPr lang="en-US" b="1" dirty="0" err="1"/>
+              <a:t>Before_ifelseop</a:t>
+            </a:r>
+            <a:endParaRPr lang="en-IN" b="1" dirty="0"/>
+          </a:p>
+        </p:txBody>
+      </p:sp>
+      <p:sp>
+        <p:nvSpPr>
+          <p:cNvPr id="26" name="TextBox 25">
+            <a:extLst>
+              <a:ext uri="{FF2B5EF4-FFF2-40B4-BE49-F238E27FC236}">
+                <a16:creationId xmlns:a16="http://schemas.microsoft.com/office/drawing/2014/main" id="{7A429596-AB25-09C8-B9F2-4658A03B62AB}"/>
+              </a:ext>
+            </a:extLst>
+          </p:cNvPr>
+          <p:cNvSpPr txBox="1"/>
+          <p:nvPr/>
+        </p:nvSpPr>
+        <p:spPr>
+          <a:xfrm>
+            <a:off x="5278082" y="521348"/>
+            <a:ext cx="1848119" cy="369332"/>
+          </a:xfrm>
+          <a:prstGeom prst="rect">
+            <a:avLst/>
+          </a:prstGeom>
+          <a:noFill/>
+        </p:spPr>
+        <p:txBody>
+          <a:bodyPr wrap="square" rtlCol="0">
+            <a:spAutoFit/>
+          </a:bodyPr>
+          <a:lstStyle/>
+          <a:p>
+            <a:pPr algn="ctr"/>
+            <a:r>
+              <a:rPr lang="en-US" b="1" dirty="0"/>
+              <a:t>Original Circuit</a:t>
+            </a:r>
+            <a:endParaRPr lang="en-IN" b="1" dirty="0"/>
+          </a:p>
+        </p:txBody>
+      </p:sp>
+      <p:sp>
+        <p:nvSpPr>
+          <p:cNvPr id="27" name="TextBox 26">
+            <a:extLst>
+              <a:ext uri="{FF2B5EF4-FFF2-40B4-BE49-F238E27FC236}">
+                <a16:creationId xmlns:a16="http://schemas.microsoft.com/office/drawing/2014/main" id="{4FD885A5-BD2C-A7AA-81DE-1B1F1948B103}"/>
+              </a:ext>
+            </a:extLst>
+          </p:cNvPr>
+          <p:cNvSpPr txBox="1"/>
+          <p:nvPr/>
+        </p:nvSpPr>
+        <p:spPr>
+          <a:xfrm>
+            <a:off x="4616912" y="6324538"/>
+            <a:ext cx="2865658" cy="369332"/>
+          </a:xfrm>
+          <a:prstGeom prst="rect">
+            <a:avLst/>
+          </a:prstGeom>
+          <a:noFill/>
+        </p:spPr>
+        <p:txBody>
+          <a:bodyPr wrap="square" rtlCol="0">
+            <a:spAutoFit/>
+          </a:bodyPr>
+          <a:lstStyle/>
+          <a:p>
+            <a:pPr algn="ctr"/>
+            <a:r>
+              <a:rPr lang="en-US" dirty="0"/>
+              <a:t>Circuit: </a:t>
+            </a:r>
+            <a:r>
+              <a:rPr lang="en-US" b="1" dirty="0" err="1"/>
+              <a:t>Ifelseop</a:t>
+            </a:r>
+            <a:endParaRPr lang="en-IN" b="1" dirty="0"/>
+          </a:p>
+        </p:txBody>
+      </p:sp>
+      <p:sp>
+        <p:nvSpPr>
+          <p:cNvPr id="28" name="TextBox 27">
+            <a:extLst>
+              <a:ext uri="{FF2B5EF4-FFF2-40B4-BE49-F238E27FC236}">
+                <a16:creationId xmlns:a16="http://schemas.microsoft.com/office/drawing/2014/main" id="{9A4C05B1-5F73-4EF3-EE21-80D413BA0067}"/>
+              </a:ext>
+            </a:extLst>
+          </p:cNvPr>
+          <p:cNvSpPr txBox="1"/>
+          <p:nvPr/>
+        </p:nvSpPr>
+        <p:spPr>
+          <a:xfrm>
+            <a:off x="8505500" y="6324538"/>
+            <a:ext cx="2865658" cy="369332"/>
+          </a:xfrm>
+          <a:prstGeom prst="rect">
+            <a:avLst/>
+          </a:prstGeom>
+          <a:noFill/>
+        </p:spPr>
+        <p:txBody>
+          <a:bodyPr wrap="square" rtlCol="0">
+            <a:spAutoFit/>
+          </a:bodyPr>
+          <a:lstStyle/>
+          <a:p>
+            <a:pPr algn="ctr"/>
+            <a:r>
+              <a:rPr lang="en-US" dirty="0"/>
+              <a:t>Circuit: </a:t>
+            </a:r>
+            <a:r>
+              <a:rPr lang="en-US" b="1" dirty="0" err="1"/>
+              <a:t>After_ifelseop</a:t>
+            </a:r>
+            <a:endParaRPr lang="en-IN" b="1" dirty="0"/>
+          </a:p>
+        </p:txBody>
+      </p:sp>
     </p:spTree>
     <p:extLst>
       <p:ext uri="{BB962C8B-B14F-4D97-AF65-F5344CB8AC3E}">
         <p14:creationId xmlns:p14="http://schemas.microsoft.com/office/powerpoint/2010/main" val="2345542429"/>
+      </p:ext>
+    </p:extLst>
+  </p:cSld>
+  <p:clrMapOvr>
+    <a:masterClrMapping/>
+  </p:clrMapOvr>
+</p:sld>
+</file>
+
+<file path=ppt/slides/slide3.xml><?xml version="1.0" encoding="utf-8"?>
+<p:sld xmlns:a="http://schemas.openxmlformats.org/drawingml/2006/main" xmlns:r="http://schemas.openxmlformats.org/officeDocument/2006/relationships" xmlns:p="http://schemas.openxmlformats.org/presentationml/2006/main">
+  <p:cSld>
+    <p:spTree>
+      <p:nvGrpSpPr>
+        <p:cNvPr id="1" name=""/>
+        <p:cNvGrpSpPr/>
+        <p:nvPr/>
+      </p:nvGrpSpPr>
+      <p:grpSpPr>
+        <a:xfrm>
+          <a:off x="0" y="0"/>
+          <a:ext cx="0" cy="0"/>
+          <a:chOff x="0" y="0"/>
+          <a:chExt cx="0" cy="0"/>
+        </a:xfrm>
+      </p:grpSpPr>
+      <p:sp>
+        <p:nvSpPr>
+          <p:cNvPr id="2" name="Title 1">
+            <a:extLst>
+              <a:ext uri="{FF2B5EF4-FFF2-40B4-BE49-F238E27FC236}">
+                <a16:creationId xmlns:a16="http://schemas.microsoft.com/office/drawing/2014/main" id="{3448DF6D-2BC2-0200-109C-6D23EAD6CB0A}"/>
+              </a:ext>
+            </a:extLst>
+          </p:cNvPr>
+          <p:cNvSpPr txBox="1">
+            <a:spLocks/>
+          </p:cNvSpPr>
+          <p:nvPr/>
+        </p:nvSpPr>
+        <p:spPr>
+          <a:xfrm>
+            <a:off x="257576" y="70830"/>
+            <a:ext cx="11790610" cy="674240"/>
+          </a:xfrm>
+          <a:prstGeom prst="rect">
+            <a:avLst/>
+          </a:prstGeom>
+        </p:spPr>
+        <p:txBody>
+          <a:bodyPr/>
+          <a:lstStyle>
+            <a:lvl1pPr algn="l" defTabSz="914400" rtl="0" eaLnBrk="1" latinLnBrk="0" hangingPunct="1">
+              <a:lnSpc>
+                <a:spcPct val="90000"/>
+              </a:lnSpc>
+              <a:spcBef>
+                <a:spcPct val="0"/>
+              </a:spcBef>
+              <a:buNone/>
+              <a:defRPr sz="4400" kern="1200">
+                <a:solidFill>
+                  <a:schemeClr val="tx1"/>
+                </a:solidFill>
+                <a:latin typeface="+mj-lt"/>
+                <a:ea typeface="+mj-ea"/>
+                <a:cs typeface="+mj-cs"/>
+              </a:defRPr>
+            </a:lvl1pPr>
+          </a:lstStyle>
+          <a:p>
+            <a:r>
+              <a:rPr lang="en-US" sz="2800" dirty="0"/>
+              <a:t>2</a:t>
+            </a:r>
+            <a:r>
+              <a:rPr lang="en-IN" sz="2800" dirty="0"/>
+              <a:t>. Apply Box for </a:t>
+            </a:r>
+            <a:r>
+              <a:rPr lang="en-IN" sz="2800" dirty="0" err="1"/>
+              <a:t>Samplomatic</a:t>
+            </a:r>
+            <a:r>
+              <a:rPr lang="en-IN" sz="2800" dirty="0"/>
+              <a:t> to </a:t>
+            </a:r>
+            <a:r>
+              <a:rPr lang="en-IN" sz="2800" b="1" dirty="0" err="1"/>
+              <a:t>Before_ifelseop</a:t>
+            </a:r>
+            <a:r>
+              <a:rPr lang="en-IN" sz="2800" b="1" dirty="0"/>
+              <a:t> </a:t>
+            </a:r>
+            <a:r>
+              <a:rPr lang="en-IN" sz="2800" dirty="0"/>
+              <a:t>and </a:t>
+            </a:r>
+            <a:r>
+              <a:rPr lang="en-IN" sz="2800" b="1" dirty="0" err="1"/>
+              <a:t>After_ifelseop</a:t>
+            </a:r>
+            <a:r>
+              <a:rPr lang="en-IN" sz="2800" dirty="0"/>
+              <a:t> </a:t>
+            </a:r>
+          </a:p>
+        </p:txBody>
+      </p:sp>
+      <p:pic>
+        <p:nvPicPr>
+          <p:cNvPr id="4" name="Picture 3" descr="A diagram of a machine&#10;&#10;AI-generated content may be incorrect.">
+            <a:extLst>
+              <a:ext uri="{FF2B5EF4-FFF2-40B4-BE49-F238E27FC236}">
+                <a16:creationId xmlns:a16="http://schemas.microsoft.com/office/drawing/2014/main" id="{BE160882-374E-F53E-CB9C-87C2501CFFE2}"/>
+              </a:ext>
+            </a:extLst>
+          </p:cNvPr>
+          <p:cNvPicPr>
+            <a:picLocks noChangeAspect="1"/>
+          </p:cNvPicPr>
+          <p:nvPr/>
+        </p:nvPicPr>
+        <p:blipFill>
+          <a:blip r:embed="rId2"/>
+          <a:stretch>
+            <a:fillRect/>
+          </a:stretch>
+        </p:blipFill>
+        <p:spPr>
+          <a:xfrm>
+            <a:off x="257576" y="682719"/>
+            <a:ext cx="5672355" cy="3939771"/>
+          </a:xfrm>
+          <a:prstGeom prst="rect">
+            <a:avLst/>
+          </a:prstGeom>
+        </p:spPr>
+      </p:pic>
+      <p:pic>
+        <p:nvPicPr>
+          <p:cNvPr id="6" name="Picture 5" descr="A diagram of a graph&#10;&#10;AI-generated content may be incorrect.">
+            <a:extLst>
+              <a:ext uri="{FF2B5EF4-FFF2-40B4-BE49-F238E27FC236}">
+                <a16:creationId xmlns:a16="http://schemas.microsoft.com/office/drawing/2014/main" id="{5F17F90C-B8D8-41C5-2A9F-7C48CEA370CE}"/>
+              </a:ext>
+            </a:extLst>
+          </p:cNvPr>
+          <p:cNvPicPr>
+            <a:picLocks noChangeAspect="1"/>
+          </p:cNvPicPr>
+          <p:nvPr/>
+        </p:nvPicPr>
+        <p:blipFill>
+          <a:blip r:embed="rId3"/>
+          <a:stretch>
+            <a:fillRect/>
+          </a:stretch>
+        </p:blipFill>
+        <p:spPr>
+          <a:xfrm>
+            <a:off x="5929931" y="2591943"/>
+            <a:ext cx="5943574" cy="4128148"/>
+          </a:xfrm>
+          <a:prstGeom prst="rect">
+            <a:avLst/>
+          </a:prstGeom>
+        </p:spPr>
+      </p:pic>
+      <p:sp>
+        <p:nvSpPr>
+          <p:cNvPr id="7" name="TextBox 6">
+            <a:extLst>
+              <a:ext uri="{FF2B5EF4-FFF2-40B4-BE49-F238E27FC236}">
+                <a16:creationId xmlns:a16="http://schemas.microsoft.com/office/drawing/2014/main" id="{761BA5FF-68B6-5517-086D-1BE4FE100C1B}"/>
+              </a:ext>
+            </a:extLst>
+          </p:cNvPr>
+          <p:cNvSpPr txBox="1"/>
+          <p:nvPr/>
+        </p:nvSpPr>
+        <p:spPr>
+          <a:xfrm>
+            <a:off x="1660924" y="4437824"/>
+            <a:ext cx="2865658" cy="369332"/>
+          </a:xfrm>
+          <a:prstGeom prst="rect">
+            <a:avLst/>
+          </a:prstGeom>
+          <a:noFill/>
+        </p:spPr>
+        <p:txBody>
+          <a:bodyPr wrap="square" rtlCol="0">
+            <a:spAutoFit/>
+          </a:bodyPr>
+          <a:lstStyle/>
+          <a:p>
+            <a:pPr algn="ctr"/>
+            <a:r>
+              <a:rPr lang="en-US" dirty="0"/>
+              <a:t>Circuit: </a:t>
+            </a:r>
+            <a:r>
+              <a:rPr lang="en-US" b="1" dirty="0" err="1"/>
+              <a:t>Before_ifelseop</a:t>
+            </a:r>
+            <a:endParaRPr lang="en-IN" b="1" dirty="0"/>
+          </a:p>
+        </p:txBody>
+      </p:sp>
+      <p:sp>
+        <p:nvSpPr>
+          <p:cNvPr id="8" name="TextBox 7">
+            <a:extLst>
+              <a:ext uri="{FF2B5EF4-FFF2-40B4-BE49-F238E27FC236}">
+                <a16:creationId xmlns:a16="http://schemas.microsoft.com/office/drawing/2014/main" id="{1CBBEAEE-FE6A-F35F-89E6-B10ED185A3EF}"/>
+              </a:ext>
+            </a:extLst>
+          </p:cNvPr>
+          <p:cNvSpPr txBox="1"/>
+          <p:nvPr/>
+        </p:nvSpPr>
+        <p:spPr>
+          <a:xfrm>
+            <a:off x="7468889" y="2291369"/>
+            <a:ext cx="2865658" cy="369332"/>
+          </a:xfrm>
+          <a:prstGeom prst="rect">
+            <a:avLst/>
+          </a:prstGeom>
+          <a:noFill/>
+        </p:spPr>
+        <p:txBody>
+          <a:bodyPr wrap="square" rtlCol="0">
+            <a:spAutoFit/>
+          </a:bodyPr>
+          <a:lstStyle/>
+          <a:p>
+            <a:pPr algn="ctr"/>
+            <a:r>
+              <a:rPr lang="en-US" dirty="0"/>
+              <a:t>Circuit: </a:t>
+            </a:r>
+            <a:r>
+              <a:rPr lang="en-US" b="1" dirty="0" err="1"/>
+              <a:t>After_ifelseop</a:t>
+            </a:r>
+            <a:endParaRPr lang="en-IN" b="1" dirty="0"/>
+          </a:p>
+        </p:txBody>
+      </p:sp>
+      <p:sp>
+        <p:nvSpPr>
+          <p:cNvPr id="9" name="TextBox 8">
+            <a:extLst>
+              <a:ext uri="{FF2B5EF4-FFF2-40B4-BE49-F238E27FC236}">
+                <a16:creationId xmlns:a16="http://schemas.microsoft.com/office/drawing/2014/main" id="{4BE52BEF-019A-3A38-5B2A-90A548BF8154}"/>
+              </a:ext>
+            </a:extLst>
+          </p:cNvPr>
+          <p:cNvSpPr txBox="1"/>
+          <p:nvPr/>
+        </p:nvSpPr>
+        <p:spPr>
+          <a:xfrm>
+            <a:off x="199624" y="4987394"/>
+            <a:ext cx="5896376" cy="923330"/>
+          </a:xfrm>
+          <a:prstGeom prst="rect">
+            <a:avLst/>
+          </a:prstGeom>
+          <a:noFill/>
+        </p:spPr>
+        <p:txBody>
+          <a:bodyPr wrap="square" rtlCol="0">
+            <a:spAutoFit/>
+          </a:bodyPr>
+          <a:lstStyle/>
+          <a:p>
+            <a:pPr algn="just"/>
+            <a:r>
+              <a:rPr lang="en-US" b="1" dirty="0"/>
+              <a:t>Note: </a:t>
+            </a:r>
+            <a:r>
+              <a:rPr lang="en-US" dirty="0"/>
+              <a:t>Don’t apply twirling box to mid circuit measurement as we will not be able to correct for Pauli Twirling before further processing and we will not get correct results. </a:t>
+            </a:r>
+            <a:endParaRPr lang="en-IN" b="1" dirty="0"/>
+          </a:p>
+        </p:txBody>
+      </p:sp>
+    </p:spTree>
+    <p:extLst>
+      <p:ext uri="{BB962C8B-B14F-4D97-AF65-F5344CB8AC3E}">
+        <p14:creationId xmlns:p14="http://schemas.microsoft.com/office/powerpoint/2010/main" val="2534275358"/>
+      </p:ext>
+    </p:extLst>
+  </p:cSld>
+  <p:clrMapOvr>
+    <a:masterClrMapping/>
+  </p:clrMapOvr>
+</p:sld>
+</file>
+
+<file path=ppt/slides/slide4.xml><?xml version="1.0" encoding="utf-8"?>
+<p:sld xmlns:a="http://schemas.openxmlformats.org/drawingml/2006/main" xmlns:r="http://schemas.openxmlformats.org/officeDocument/2006/relationships" xmlns:p="http://schemas.openxmlformats.org/presentationml/2006/main">
+  <p:cSld>
+    <p:spTree>
+      <p:nvGrpSpPr>
+        <p:cNvPr id="1" name=""/>
+        <p:cNvGrpSpPr/>
+        <p:nvPr/>
+      </p:nvGrpSpPr>
+      <p:grpSpPr>
+        <a:xfrm>
+          <a:off x="0" y="0"/>
+          <a:ext cx="0" cy="0"/>
+          <a:chOff x="0" y="0"/>
+          <a:chExt cx="0" cy="0"/>
+        </a:xfrm>
+      </p:grpSpPr>
+      <p:sp>
+        <p:nvSpPr>
+          <p:cNvPr id="2" name="Title 1">
+            <a:extLst>
+              <a:ext uri="{FF2B5EF4-FFF2-40B4-BE49-F238E27FC236}">
+                <a16:creationId xmlns:a16="http://schemas.microsoft.com/office/drawing/2014/main" id="{6AA94B18-8818-D75D-DF77-FB48AC24509D}"/>
+              </a:ext>
+            </a:extLst>
+          </p:cNvPr>
+          <p:cNvSpPr txBox="1">
+            <a:spLocks/>
+          </p:cNvSpPr>
+          <p:nvPr/>
+        </p:nvSpPr>
+        <p:spPr>
+          <a:xfrm>
+            <a:off x="257576" y="83707"/>
+            <a:ext cx="11790610" cy="869329"/>
+          </a:xfrm>
+          <a:prstGeom prst="rect">
+            <a:avLst/>
+          </a:prstGeom>
+        </p:spPr>
+        <p:txBody>
+          <a:bodyPr/>
+          <a:lstStyle>
+            <a:lvl1pPr algn="l" defTabSz="914400" rtl="0" eaLnBrk="1" latinLnBrk="0" hangingPunct="1">
+              <a:lnSpc>
+                <a:spcPct val="90000"/>
+              </a:lnSpc>
+              <a:spcBef>
+                <a:spcPct val="0"/>
+              </a:spcBef>
+              <a:buNone/>
+              <a:defRPr sz="4400" kern="1200">
+                <a:solidFill>
+                  <a:schemeClr val="tx1"/>
+                </a:solidFill>
+                <a:latin typeface="+mj-lt"/>
+                <a:ea typeface="+mj-ea"/>
+                <a:cs typeface="+mj-cs"/>
+              </a:defRPr>
+            </a:lvl1pPr>
+          </a:lstStyle>
+          <a:p>
+            <a:r>
+              <a:rPr lang="en-US" sz="2800" dirty="0"/>
+              <a:t>3</a:t>
+            </a:r>
+            <a:r>
+              <a:rPr lang="en-IN" sz="2800" dirty="0"/>
+              <a:t>. Combine </a:t>
+            </a:r>
+            <a:r>
+              <a:rPr lang="en-IN" sz="2800" b="1" dirty="0" err="1"/>
+              <a:t>Before_ifelseop</a:t>
+            </a:r>
+            <a:r>
+              <a:rPr lang="en-IN" sz="2800" b="1" dirty="0"/>
+              <a:t> </a:t>
+            </a:r>
+            <a:r>
+              <a:rPr lang="en-IN" sz="2800" dirty="0"/>
+              <a:t>and </a:t>
+            </a:r>
+            <a:r>
+              <a:rPr lang="en-IN" sz="2800" b="1" dirty="0" err="1"/>
+              <a:t>After_ifelseop</a:t>
+            </a:r>
+            <a:r>
+              <a:rPr lang="en-IN" sz="2800" dirty="0"/>
+              <a:t> with a barrier to label dissection point</a:t>
+            </a:r>
+          </a:p>
+        </p:txBody>
+      </p:sp>
+      <p:pic>
+        <p:nvPicPr>
+          <p:cNvPr id="4" name="Picture 3" descr="A diagram of a computer&#10;&#10;AI-generated content may be incorrect.">
+            <a:extLst>
+              <a:ext uri="{FF2B5EF4-FFF2-40B4-BE49-F238E27FC236}">
+                <a16:creationId xmlns:a16="http://schemas.microsoft.com/office/drawing/2014/main" id="{DB0A588C-B9CA-5C2D-C3C4-F5DB3D95B9C3}"/>
+              </a:ext>
+            </a:extLst>
+          </p:cNvPr>
+          <p:cNvPicPr>
+            <a:picLocks noChangeAspect="1"/>
+          </p:cNvPicPr>
+          <p:nvPr/>
+        </p:nvPicPr>
+        <p:blipFill>
+          <a:blip r:embed="rId2"/>
+          <a:stretch>
+            <a:fillRect/>
+          </a:stretch>
+        </p:blipFill>
+        <p:spPr>
+          <a:xfrm>
+            <a:off x="413196" y="1264025"/>
+            <a:ext cx="11365607" cy="3999440"/>
+          </a:xfrm>
+          <a:prstGeom prst="rect">
+            <a:avLst/>
+          </a:prstGeom>
+        </p:spPr>
+      </p:pic>
+      <p:sp>
+        <p:nvSpPr>
+          <p:cNvPr id="5" name="Rectangle 4">
+            <a:extLst>
+              <a:ext uri="{FF2B5EF4-FFF2-40B4-BE49-F238E27FC236}">
+                <a16:creationId xmlns:a16="http://schemas.microsoft.com/office/drawing/2014/main" id="{2BB3DA66-FAF9-F62E-6147-E3010A749F7A}"/>
+              </a:ext>
+            </a:extLst>
+          </p:cNvPr>
+          <p:cNvSpPr/>
+          <p:nvPr/>
+        </p:nvSpPr>
+        <p:spPr>
+          <a:xfrm>
+            <a:off x="413196" y="1264025"/>
+            <a:ext cx="5762224" cy="4310430"/>
+          </a:xfrm>
+          <a:prstGeom prst="rect">
+            <a:avLst/>
+          </a:prstGeom>
+          <a:noFill/>
+          <a:ln w="38100">
+            <a:solidFill>
+              <a:schemeClr val="tx1"/>
+            </a:solidFill>
+          </a:ln>
+        </p:spPr>
+        <p:style>
+          <a:lnRef idx="2">
+            <a:schemeClr val="accent1">
+              <a:shade val="15000"/>
+            </a:schemeClr>
+          </a:lnRef>
+          <a:fillRef idx="1">
+            <a:schemeClr val="accent1"/>
+          </a:fillRef>
+          <a:effectRef idx="0">
+            <a:schemeClr val="accent1"/>
+          </a:effectRef>
+          <a:fontRef idx="minor">
+            <a:schemeClr val="lt1"/>
+          </a:fontRef>
+        </p:style>
+        <p:txBody>
+          <a:bodyPr rtlCol="0" anchor="ctr"/>
+          <a:lstStyle/>
+          <a:p>
+            <a:pPr algn="ctr"/>
+            <a:endParaRPr lang="en-IN"/>
+          </a:p>
+        </p:txBody>
+      </p:sp>
+      <p:sp>
+        <p:nvSpPr>
+          <p:cNvPr id="6" name="Rectangle 5">
+            <a:extLst>
+              <a:ext uri="{FF2B5EF4-FFF2-40B4-BE49-F238E27FC236}">
+                <a16:creationId xmlns:a16="http://schemas.microsoft.com/office/drawing/2014/main" id="{16A27804-8323-AF1C-E5EF-AEC1C6848DEA}"/>
+              </a:ext>
+            </a:extLst>
+          </p:cNvPr>
+          <p:cNvSpPr/>
+          <p:nvPr/>
+        </p:nvSpPr>
+        <p:spPr>
+          <a:xfrm>
+            <a:off x="6882683" y="1283545"/>
+            <a:ext cx="5049593" cy="4310430"/>
+          </a:xfrm>
+          <a:prstGeom prst="rect">
+            <a:avLst/>
+          </a:prstGeom>
+          <a:noFill/>
+          <a:ln w="38100">
+            <a:solidFill>
+              <a:schemeClr val="tx1"/>
+            </a:solidFill>
+          </a:ln>
+        </p:spPr>
+        <p:style>
+          <a:lnRef idx="2">
+            <a:schemeClr val="accent1">
+              <a:shade val="15000"/>
+            </a:schemeClr>
+          </a:lnRef>
+          <a:fillRef idx="1">
+            <a:schemeClr val="accent1"/>
+          </a:fillRef>
+          <a:effectRef idx="0">
+            <a:schemeClr val="accent1"/>
+          </a:effectRef>
+          <a:fontRef idx="minor">
+            <a:schemeClr val="lt1"/>
+          </a:fontRef>
+        </p:style>
+        <p:txBody>
+          <a:bodyPr rtlCol="0" anchor="ctr"/>
+          <a:lstStyle/>
+          <a:p>
+            <a:pPr algn="ctr"/>
+            <a:endParaRPr lang="en-IN"/>
+          </a:p>
+        </p:txBody>
+      </p:sp>
+      <p:sp>
+        <p:nvSpPr>
+          <p:cNvPr id="7" name="TextBox 6">
+            <a:extLst>
+              <a:ext uri="{FF2B5EF4-FFF2-40B4-BE49-F238E27FC236}">
+                <a16:creationId xmlns:a16="http://schemas.microsoft.com/office/drawing/2014/main" id="{0FB81D3B-552B-78B1-3223-197C286F6F25}"/>
+              </a:ext>
+            </a:extLst>
+          </p:cNvPr>
+          <p:cNvSpPr txBox="1"/>
+          <p:nvPr/>
+        </p:nvSpPr>
+        <p:spPr>
+          <a:xfrm>
+            <a:off x="1861479" y="5684125"/>
+            <a:ext cx="2865658" cy="369332"/>
+          </a:xfrm>
+          <a:prstGeom prst="rect">
+            <a:avLst/>
+          </a:prstGeom>
+          <a:noFill/>
+        </p:spPr>
+        <p:txBody>
+          <a:bodyPr wrap="square" rtlCol="0">
+            <a:spAutoFit/>
+          </a:bodyPr>
+          <a:lstStyle/>
+          <a:p>
+            <a:pPr algn="ctr"/>
+            <a:r>
+              <a:rPr lang="en-US" dirty="0"/>
+              <a:t>Circuit: </a:t>
+            </a:r>
+            <a:r>
+              <a:rPr lang="en-US" b="1" dirty="0" err="1"/>
+              <a:t>Before_ifelseop</a:t>
+            </a:r>
+            <a:endParaRPr lang="en-IN" b="1" dirty="0"/>
+          </a:p>
+        </p:txBody>
+      </p:sp>
+      <p:sp>
+        <p:nvSpPr>
+          <p:cNvPr id="8" name="TextBox 7">
+            <a:extLst>
+              <a:ext uri="{FF2B5EF4-FFF2-40B4-BE49-F238E27FC236}">
+                <a16:creationId xmlns:a16="http://schemas.microsoft.com/office/drawing/2014/main" id="{BEFCA57F-D4DD-81B1-EE84-D8947A8B07D0}"/>
+              </a:ext>
+            </a:extLst>
+          </p:cNvPr>
+          <p:cNvSpPr txBox="1"/>
+          <p:nvPr/>
+        </p:nvSpPr>
+        <p:spPr>
+          <a:xfrm>
+            <a:off x="8392623" y="5684125"/>
+            <a:ext cx="2865658" cy="369332"/>
+          </a:xfrm>
+          <a:prstGeom prst="rect">
+            <a:avLst/>
+          </a:prstGeom>
+          <a:noFill/>
+        </p:spPr>
+        <p:txBody>
+          <a:bodyPr wrap="square" rtlCol="0">
+            <a:spAutoFit/>
+          </a:bodyPr>
+          <a:lstStyle/>
+          <a:p>
+            <a:pPr algn="ctr"/>
+            <a:r>
+              <a:rPr lang="en-US" dirty="0"/>
+              <a:t>Circuit: </a:t>
+            </a:r>
+            <a:r>
+              <a:rPr lang="en-US" b="1" dirty="0" err="1"/>
+              <a:t>After_ifelseop</a:t>
+            </a:r>
+            <a:endParaRPr lang="en-IN" b="1" dirty="0"/>
+          </a:p>
+        </p:txBody>
+      </p:sp>
+    </p:spTree>
+    <p:extLst>
+      <p:ext uri="{BB962C8B-B14F-4D97-AF65-F5344CB8AC3E}">
+        <p14:creationId xmlns:p14="http://schemas.microsoft.com/office/powerpoint/2010/main" val="971762284"/>
+      </p:ext>
+    </p:extLst>
+  </p:cSld>
+  <p:clrMapOvr>
+    <a:masterClrMapping/>
+  </p:clrMapOvr>
+</p:sld>
+</file>
+
+<file path=ppt/slides/slide5.xml><?xml version="1.0" encoding="utf-8"?>
+<p:sld xmlns:a="http://schemas.openxmlformats.org/drawingml/2006/main" xmlns:r="http://schemas.openxmlformats.org/officeDocument/2006/relationships" xmlns:p="http://schemas.openxmlformats.org/presentationml/2006/main">
+  <p:cSld>
+    <p:spTree>
+      <p:nvGrpSpPr>
+        <p:cNvPr id="1" name=""/>
+        <p:cNvGrpSpPr/>
+        <p:nvPr/>
+      </p:nvGrpSpPr>
+      <p:grpSpPr>
+        <a:xfrm>
+          <a:off x="0" y="0"/>
+          <a:ext cx="0" cy="0"/>
+          <a:chOff x="0" y="0"/>
+          <a:chExt cx="0" cy="0"/>
+        </a:xfrm>
+      </p:grpSpPr>
+      <p:sp>
+        <p:nvSpPr>
+          <p:cNvPr id="2" name="Title 1">
+            <a:extLst>
+              <a:ext uri="{FF2B5EF4-FFF2-40B4-BE49-F238E27FC236}">
+                <a16:creationId xmlns:a16="http://schemas.microsoft.com/office/drawing/2014/main" id="{E14C486B-89AF-00C4-9588-580B8361CD52}"/>
+              </a:ext>
+            </a:extLst>
+          </p:cNvPr>
+          <p:cNvSpPr txBox="1">
+            <a:spLocks/>
+          </p:cNvSpPr>
+          <p:nvPr/>
+        </p:nvSpPr>
+        <p:spPr>
+          <a:xfrm>
+            <a:off x="257576" y="83707"/>
+            <a:ext cx="11790610" cy="869329"/>
+          </a:xfrm>
+          <a:prstGeom prst="rect">
+            <a:avLst/>
+          </a:prstGeom>
+        </p:spPr>
+        <p:txBody>
+          <a:bodyPr/>
+          <a:lstStyle>
+            <a:lvl1pPr algn="l" defTabSz="914400" rtl="0" eaLnBrk="1" latinLnBrk="0" hangingPunct="1">
+              <a:lnSpc>
+                <a:spcPct val="90000"/>
+              </a:lnSpc>
+              <a:spcBef>
+                <a:spcPct val="0"/>
+              </a:spcBef>
+              <a:buNone/>
+              <a:defRPr sz="4400" kern="1200">
+                <a:solidFill>
+                  <a:schemeClr val="tx1"/>
+                </a:solidFill>
+                <a:latin typeface="+mj-lt"/>
+                <a:ea typeface="+mj-ea"/>
+                <a:cs typeface="+mj-cs"/>
+              </a:defRPr>
+            </a:lvl1pPr>
+          </a:lstStyle>
+          <a:p>
+            <a:r>
+              <a:rPr lang="en-US" sz="2800" dirty="0"/>
+              <a:t>4</a:t>
+            </a:r>
+            <a:r>
+              <a:rPr lang="en-IN" sz="2800" dirty="0"/>
+              <a:t>. Construct </a:t>
+            </a:r>
+            <a:r>
+              <a:rPr lang="en-IN" sz="2800" b="1" dirty="0"/>
+              <a:t>Template</a:t>
+            </a:r>
+            <a:r>
+              <a:rPr lang="en-IN" sz="2800" dirty="0"/>
+              <a:t> and </a:t>
+            </a:r>
+            <a:r>
+              <a:rPr lang="en-IN" sz="2800" b="1" dirty="0" err="1"/>
+              <a:t>Samplex</a:t>
+            </a:r>
+            <a:r>
+              <a:rPr lang="en-IN" sz="2800" b="1" dirty="0"/>
+              <a:t> </a:t>
+            </a:r>
+            <a:r>
+              <a:rPr lang="en-IN" sz="2800" dirty="0"/>
+              <a:t>from the combined circuit and their randomizations for Twirling</a:t>
+            </a:r>
+            <a:endParaRPr lang="en-IN" sz="2800" b="1" dirty="0"/>
+          </a:p>
+        </p:txBody>
+      </p:sp>
+      <p:pic>
+        <p:nvPicPr>
+          <p:cNvPr id="4" name="Picture 3" descr="A diagram of a computer&#10;&#10;AI-generated content may be incorrect.">
+            <a:extLst>
+              <a:ext uri="{FF2B5EF4-FFF2-40B4-BE49-F238E27FC236}">
+                <a16:creationId xmlns:a16="http://schemas.microsoft.com/office/drawing/2014/main" id="{23851318-886B-1145-83F8-31FB87F4F73D}"/>
+              </a:ext>
+            </a:extLst>
+          </p:cNvPr>
+          <p:cNvPicPr>
+            <a:picLocks noChangeAspect="1"/>
+          </p:cNvPicPr>
+          <p:nvPr/>
+        </p:nvPicPr>
+        <p:blipFill>
+          <a:blip r:embed="rId2"/>
+          <a:srcRect r="52343"/>
+          <a:stretch>
+            <a:fillRect/>
+          </a:stretch>
+        </p:blipFill>
+        <p:spPr>
+          <a:xfrm>
+            <a:off x="75983" y="1007276"/>
+            <a:ext cx="8818158" cy="2697614"/>
+          </a:xfrm>
+          <a:prstGeom prst="rect">
+            <a:avLst/>
+          </a:prstGeom>
+        </p:spPr>
+      </p:pic>
+      <p:pic>
+        <p:nvPicPr>
+          <p:cNvPr id="5" name="Picture 4" descr="A diagram of a computer&#10;&#10;AI-generated content may be incorrect.">
+            <a:extLst>
+              <a:ext uri="{FF2B5EF4-FFF2-40B4-BE49-F238E27FC236}">
+                <a16:creationId xmlns:a16="http://schemas.microsoft.com/office/drawing/2014/main" id="{F48D1B22-028A-F147-9FA1-7BAA6B6D3B65}"/>
+              </a:ext>
+            </a:extLst>
+          </p:cNvPr>
+          <p:cNvPicPr>
+            <a:picLocks noChangeAspect="1"/>
+          </p:cNvPicPr>
+          <p:nvPr/>
+        </p:nvPicPr>
+        <p:blipFill>
+          <a:blip r:embed="rId2"/>
+          <a:srcRect l="47675"/>
+          <a:stretch>
+            <a:fillRect/>
+          </a:stretch>
+        </p:blipFill>
+        <p:spPr>
+          <a:xfrm>
+            <a:off x="2179542" y="3718287"/>
+            <a:ext cx="9681900" cy="2697613"/>
+          </a:xfrm>
+          <a:prstGeom prst="rect">
+            <a:avLst/>
+          </a:prstGeom>
+        </p:spPr>
+      </p:pic>
+      <p:sp>
+        <p:nvSpPr>
+          <p:cNvPr id="6" name="TextBox 5">
+            <a:extLst>
+              <a:ext uri="{FF2B5EF4-FFF2-40B4-BE49-F238E27FC236}">
+                <a16:creationId xmlns:a16="http://schemas.microsoft.com/office/drawing/2014/main" id="{52233CC5-4B57-7219-096D-64AAD1ABE781}"/>
+              </a:ext>
+            </a:extLst>
+          </p:cNvPr>
+          <p:cNvSpPr txBox="1"/>
+          <p:nvPr/>
+        </p:nvSpPr>
+        <p:spPr>
+          <a:xfrm>
+            <a:off x="4720052" y="6354094"/>
+            <a:ext cx="2865658" cy="369332"/>
+          </a:xfrm>
+          <a:prstGeom prst="rect">
+            <a:avLst/>
+          </a:prstGeom>
+          <a:noFill/>
+        </p:spPr>
+        <p:txBody>
+          <a:bodyPr wrap="square" rtlCol="0">
+            <a:spAutoFit/>
+          </a:bodyPr>
+          <a:lstStyle/>
+          <a:p>
+            <a:pPr algn="ctr"/>
+            <a:r>
+              <a:rPr lang="en-US" dirty="0"/>
+              <a:t>Circuit: </a:t>
+            </a:r>
+            <a:r>
+              <a:rPr lang="en-US" b="1" dirty="0"/>
+              <a:t>Template</a:t>
+            </a:r>
+            <a:endParaRPr lang="en-IN" b="1" dirty="0"/>
+          </a:p>
+        </p:txBody>
+      </p:sp>
+    </p:spTree>
+    <p:extLst>
+      <p:ext uri="{BB962C8B-B14F-4D97-AF65-F5344CB8AC3E}">
+        <p14:creationId xmlns:p14="http://schemas.microsoft.com/office/powerpoint/2010/main" val="1206609737"/>
+      </p:ext>
+    </p:extLst>
+  </p:cSld>
+  <p:clrMapOvr>
+    <a:masterClrMapping/>
+  </p:clrMapOvr>
+</p:sld>
+</file>
+
+<file path=ppt/slides/slide6.xml><?xml version="1.0" encoding="utf-8"?>
+<p:sld xmlns:a="http://schemas.openxmlformats.org/drawingml/2006/main" xmlns:r="http://schemas.openxmlformats.org/officeDocument/2006/relationships" xmlns:p="http://schemas.openxmlformats.org/presentationml/2006/main">
+  <p:cSld>
+    <p:spTree>
+      <p:nvGrpSpPr>
+        <p:cNvPr id="1" name=""/>
+        <p:cNvGrpSpPr/>
+        <p:nvPr/>
+      </p:nvGrpSpPr>
+      <p:grpSpPr>
+        <a:xfrm>
+          <a:off x="0" y="0"/>
+          <a:ext cx="0" cy="0"/>
+          <a:chOff x="0" y="0"/>
+          <a:chExt cx="0" cy="0"/>
+        </a:xfrm>
+      </p:grpSpPr>
+      <p:pic>
+        <p:nvPicPr>
+          <p:cNvPr id="3" name="Picture 2" descr="A screenshot of a computer game&#10;&#10;AI-generated content may be incorrect.">
+            <a:extLst>
+              <a:ext uri="{FF2B5EF4-FFF2-40B4-BE49-F238E27FC236}">
+                <a16:creationId xmlns:a16="http://schemas.microsoft.com/office/drawing/2014/main" id="{3C81A085-3AFD-4E80-B269-70068DDFF75C}"/>
+              </a:ext>
+            </a:extLst>
+          </p:cNvPr>
+          <p:cNvPicPr>
+            <a:picLocks noChangeAspect="1"/>
+          </p:cNvPicPr>
+          <p:nvPr/>
+        </p:nvPicPr>
+        <p:blipFill>
+          <a:blip r:embed="rId2">
+            <a:extLst>
+              <a:ext uri="{28A0092B-C50C-407E-A947-70E740481C1C}">
+                <a14:useLocalDpi xmlns:a14="http://schemas.microsoft.com/office/drawing/2010/main" val="0"/>
+              </a:ext>
+            </a:extLst>
+          </a:blip>
+          <a:stretch>
+            <a:fillRect/>
+          </a:stretch>
+        </p:blipFill>
+        <p:spPr>
+          <a:xfrm>
+            <a:off x="173865" y="186132"/>
+            <a:ext cx="11884269" cy="3007829"/>
+          </a:xfrm>
+          <a:prstGeom prst="rect">
+            <a:avLst/>
+          </a:prstGeom>
+        </p:spPr>
+      </p:pic>
+      <p:pic>
+        <p:nvPicPr>
+          <p:cNvPr id="7" name="Picture 6" descr="A computer screen with white text&#10;&#10;AI-generated content may be incorrect.">
+            <a:extLst>
+              <a:ext uri="{FF2B5EF4-FFF2-40B4-BE49-F238E27FC236}">
+                <a16:creationId xmlns:a16="http://schemas.microsoft.com/office/drawing/2014/main" id="{22BE262C-E144-23DF-6813-AE286ACFC044}"/>
+              </a:ext>
+            </a:extLst>
+          </p:cNvPr>
+          <p:cNvPicPr>
+            <a:picLocks noChangeAspect="1"/>
+          </p:cNvPicPr>
+          <p:nvPr/>
+        </p:nvPicPr>
+        <p:blipFill>
+          <a:blip r:embed="rId3"/>
+          <a:stretch>
+            <a:fillRect/>
+          </a:stretch>
+        </p:blipFill>
+        <p:spPr>
+          <a:xfrm>
+            <a:off x="1970998" y="4382445"/>
+            <a:ext cx="7773485" cy="1771897"/>
+          </a:xfrm>
+          <a:prstGeom prst="rect">
+            <a:avLst/>
+          </a:prstGeom>
+        </p:spPr>
+      </p:pic>
+      <p:sp>
+        <p:nvSpPr>
+          <p:cNvPr id="8" name="TextBox 7">
+            <a:extLst>
+              <a:ext uri="{FF2B5EF4-FFF2-40B4-BE49-F238E27FC236}">
+                <a16:creationId xmlns:a16="http://schemas.microsoft.com/office/drawing/2014/main" id="{105B8726-B96B-7914-9419-3F8710380581}"/>
+              </a:ext>
+            </a:extLst>
+          </p:cNvPr>
+          <p:cNvSpPr txBox="1"/>
+          <p:nvPr/>
+        </p:nvSpPr>
+        <p:spPr>
+          <a:xfrm>
+            <a:off x="4224801" y="3603537"/>
+            <a:ext cx="2865658" cy="369332"/>
+          </a:xfrm>
+          <a:prstGeom prst="rect">
+            <a:avLst/>
+          </a:prstGeom>
+          <a:noFill/>
+        </p:spPr>
+        <p:txBody>
+          <a:bodyPr wrap="square" rtlCol="0">
+            <a:spAutoFit/>
+          </a:bodyPr>
+          <a:lstStyle/>
+          <a:p>
+            <a:pPr algn="ctr"/>
+            <a:r>
+              <a:rPr lang="en-US" b="1" dirty="0" err="1"/>
+              <a:t>Samplex</a:t>
+            </a:r>
+            <a:endParaRPr lang="en-IN" b="1" dirty="0"/>
+          </a:p>
+        </p:txBody>
+      </p:sp>
+    </p:spTree>
+    <p:extLst>
+      <p:ext uri="{BB962C8B-B14F-4D97-AF65-F5344CB8AC3E}">
+        <p14:creationId xmlns:p14="http://schemas.microsoft.com/office/powerpoint/2010/main" val="1151551209"/>
+      </p:ext>
+    </p:extLst>
+  </p:cSld>
+  <p:clrMapOvr>
+    <a:masterClrMapping/>
+  </p:clrMapOvr>
+</p:sld>
+</file>
+
+<file path=ppt/slides/slide7.xml><?xml version="1.0" encoding="utf-8"?>
+<p:sld xmlns:a="http://schemas.openxmlformats.org/drawingml/2006/main" xmlns:r="http://schemas.openxmlformats.org/officeDocument/2006/relationships" xmlns:p="http://schemas.openxmlformats.org/presentationml/2006/main">
+  <p:cSld>
+    <p:spTree>
+      <p:nvGrpSpPr>
+        <p:cNvPr id="1" name=""/>
+        <p:cNvGrpSpPr/>
+        <p:nvPr/>
+      </p:nvGrpSpPr>
+      <p:grpSpPr>
+        <a:xfrm>
+          <a:off x="0" y="0"/>
+          <a:ext cx="0" cy="0"/>
+          <a:chOff x="0" y="0"/>
+          <a:chExt cx="0" cy="0"/>
+        </a:xfrm>
+      </p:grpSpPr>
+      <p:sp>
+        <p:nvSpPr>
+          <p:cNvPr id="2" name="Title 1">
+            <a:extLst>
+              <a:ext uri="{FF2B5EF4-FFF2-40B4-BE49-F238E27FC236}">
+                <a16:creationId xmlns:a16="http://schemas.microsoft.com/office/drawing/2014/main" id="{CA5EF788-FEB4-876C-8A04-ACABA9B985B1}"/>
+              </a:ext>
+            </a:extLst>
+          </p:cNvPr>
+          <p:cNvSpPr txBox="1">
+            <a:spLocks/>
+          </p:cNvSpPr>
+          <p:nvPr/>
+        </p:nvSpPr>
+        <p:spPr>
+          <a:xfrm>
+            <a:off x="257576" y="83707"/>
+            <a:ext cx="11790610" cy="869329"/>
+          </a:xfrm>
+          <a:prstGeom prst="rect">
+            <a:avLst/>
+          </a:prstGeom>
+        </p:spPr>
+        <p:txBody>
+          <a:bodyPr/>
+          <a:lstStyle>
+            <a:lvl1pPr algn="l" defTabSz="914400" rtl="0" eaLnBrk="1" latinLnBrk="0" hangingPunct="1">
+              <a:lnSpc>
+                <a:spcPct val="90000"/>
+              </a:lnSpc>
+              <a:spcBef>
+                <a:spcPct val="0"/>
+              </a:spcBef>
+              <a:buNone/>
+              <a:defRPr sz="4400" kern="1200">
+                <a:solidFill>
+                  <a:schemeClr val="tx1"/>
+                </a:solidFill>
+                <a:latin typeface="+mj-lt"/>
+                <a:ea typeface="+mj-ea"/>
+                <a:cs typeface="+mj-cs"/>
+              </a:defRPr>
+            </a:lvl1pPr>
+          </a:lstStyle>
+          <a:p>
+            <a:r>
+              <a:rPr lang="en-US" sz="2800" dirty="0"/>
+              <a:t>5. Cut </a:t>
+            </a:r>
+            <a:r>
+              <a:rPr lang="en-US" sz="2800" b="1" dirty="0"/>
+              <a:t>Template </a:t>
+            </a:r>
+            <a:r>
+              <a:rPr lang="en-US" sz="2800" dirty="0"/>
+              <a:t>from the dissection barrier and add </a:t>
+            </a:r>
+            <a:r>
+              <a:rPr lang="en-US" sz="2800" b="1" dirty="0" err="1"/>
+              <a:t>Ifelseop</a:t>
+            </a:r>
+            <a:r>
+              <a:rPr lang="en-US" sz="2800" b="1" dirty="0"/>
+              <a:t> </a:t>
+            </a:r>
+            <a:r>
+              <a:rPr lang="en-US" sz="2800" dirty="0"/>
+              <a:t>circuit</a:t>
+            </a:r>
+            <a:endParaRPr lang="en-IN" sz="2800" b="1" dirty="0"/>
+          </a:p>
+        </p:txBody>
+      </p:sp>
+      <p:pic>
+        <p:nvPicPr>
+          <p:cNvPr id="4" name="Picture 3" descr="A blue and pink squares and lines&#10;&#10;AI-generated content may be incorrect.">
+            <a:extLst>
+              <a:ext uri="{FF2B5EF4-FFF2-40B4-BE49-F238E27FC236}">
+                <a16:creationId xmlns:a16="http://schemas.microsoft.com/office/drawing/2014/main" id="{CFF52504-DDFF-D468-113B-4368511C0A65}"/>
+              </a:ext>
+            </a:extLst>
+          </p:cNvPr>
+          <p:cNvPicPr>
+            <a:picLocks noChangeAspect="1"/>
+          </p:cNvPicPr>
+          <p:nvPr/>
+        </p:nvPicPr>
+        <p:blipFill>
+          <a:blip r:embed="rId2"/>
+          <a:srcRect r="50951"/>
+          <a:stretch>
+            <a:fillRect/>
+          </a:stretch>
+        </p:blipFill>
+        <p:spPr>
+          <a:xfrm>
+            <a:off x="727652" y="1014147"/>
+            <a:ext cx="10477488" cy="2707971"/>
+          </a:xfrm>
+          <a:prstGeom prst="rect">
+            <a:avLst/>
+          </a:prstGeom>
+        </p:spPr>
+      </p:pic>
+      <p:pic>
+        <p:nvPicPr>
+          <p:cNvPr id="5" name="Picture 4" descr="A blue and pink squares and lines&#10;&#10;AI-generated content may be incorrect.">
+            <a:extLst>
+              <a:ext uri="{FF2B5EF4-FFF2-40B4-BE49-F238E27FC236}">
+                <a16:creationId xmlns:a16="http://schemas.microsoft.com/office/drawing/2014/main" id="{752E39FF-5371-A10E-C862-62C6BBC65A7B}"/>
+              </a:ext>
+            </a:extLst>
+          </p:cNvPr>
+          <p:cNvPicPr>
+            <a:picLocks noChangeAspect="1"/>
+          </p:cNvPicPr>
+          <p:nvPr/>
+        </p:nvPicPr>
+        <p:blipFill>
+          <a:blip r:embed="rId2"/>
+          <a:srcRect l="48644"/>
+          <a:stretch>
+            <a:fillRect/>
+          </a:stretch>
+        </p:blipFill>
+        <p:spPr>
+          <a:xfrm>
+            <a:off x="727652" y="3892450"/>
+            <a:ext cx="10970147" cy="2707971"/>
+          </a:xfrm>
+          <a:prstGeom prst="rect">
+            <a:avLst/>
+          </a:prstGeom>
+        </p:spPr>
+      </p:pic>
+    </p:spTree>
+    <p:extLst>
+      <p:ext uri="{BB962C8B-B14F-4D97-AF65-F5344CB8AC3E}">
+        <p14:creationId xmlns:p14="http://schemas.microsoft.com/office/powerpoint/2010/main" val="4125391329"/>
+      </p:ext>
+    </p:extLst>
+  </p:cSld>
+  <p:clrMapOvr>
+    <a:masterClrMapping/>
+  </p:clrMapOvr>
+</p:sld>
+</file>
+
+<file path=ppt/slides/slide8.xml><?xml version="1.0" encoding="utf-8"?>
+<p:sld xmlns:a="http://schemas.openxmlformats.org/drawingml/2006/main" xmlns:r="http://schemas.openxmlformats.org/officeDocument/2006/relationships" xmlns:p="http://schemas.openxmlformats.org/presentationml/2006/main">
+  <p:cSld>
+    <p:spTree>
+      <p:nvGrpSpPr>
+        <p:cNvPr id="1" name=""/>
+        <p:cNvGrpSpPr/>
+        <p:nvPr/>
+      </p:nvGrpSpPr>
+      <p:grpSpPr>
+        <a:xfrm>
+          <a:off x="0" y="0"/>
+          <a:ext cx="0" cy="0"/>
+          <a:chOff x="0" y="0"/>
+          <a:chExt cx="0" cy="0"/>
+        </a:xfrm>
+      </p:grpSpPr>
+      <p:sp>
+        <p:nvSpPr>
+          <p:cNvPr id="2" name="Title 1">
+            <a:extLst>
+              <a:ext uri="{FF2B5EF4-FFF2-40B4-BE49-F238E27FC236}">
+                <a16:creationId xmlns:a16="http://schemas.microsoft.com/office/drawing/2014/main" id="{4B7BA414-EFF1-C051-8150-6A957EA0A1E0}"/>
+              </a:ext>
+            </a:extLst>
+          </p:cNvPr>
+          <p:cNvSpPr txBox="1">
+            <a:spLocks/>
+          </p:cNvSpPr>
+          <p:nvPr/>
+        </p:nvSpPr>
+        <p:spPr>
+          <a:xfrm>
+            <a:off x="257576" y="83707"/>
+            <a:ext cx="11790610" cy="869329"/>
+          </a:xfrm>
+          <a:prstGeom prst="rect">
+            <a:avLst/>
+          </a:prstGeom>
+        </p:spPr>
+        <p:txBody>
+          <a:bodyPr/>
+          <a:lstStyle>
+            <a:lvl1pPr algn="l" defTabSz="914400" rtl="0" eaLnBrk="1" latinLnBrk="0" hangingPunct="1">
+              <a:lnSpc>
+                <a:spcPct val="90000"/>
+              </a:lnSpc>
+              <a:spcBef>
+                <a:spcPct val="0"/>
+              </a:spcBef>
+              <a:buNone/>
+              <a:defRPr sz="4400" kern="1200">
+                <a:solidFill>
+                  <a:schemeClr val="tx1"/>
+                </a:solidFill>
+                <a:latin typeface="+mj-lt"/>
+                <a:ea typeface="+mj-ea"/>
+                <a:cs typeface="+mj-cs"/>
+              </a:defRPr>
+            </a:lvl1pPr>
+          </a:lstStyle>
+          <a:p>
+            <a:r>
+              <a:rPr lang="en-US" sz="2800" dirty="0"/>
+              <a:t>6. </a:t>
+            </a:r>
+            <a:r>
+              <a:rPr lang="en-US" sz="2800" dirty="0" err="1"/>
+              <a:t>Transpile</a:t>
+            </a:r>
+            <a:r>
+              <a:rPr lang="en-US" sz="2800" dirty="0"/>
+              <a:t> </a:t>
+            </a:r>
+            <a:r>
+              <a:rPr lang="en-US" sz="2800" b="1" dirty="0"/>
+              <a:t>Template </a:t>
+            </a:r>
+            <a:r>
+              <a:rPr lang="en-US" sz="2800" dirty="0"/>
+              <a:t>for backend</a:t>
+            </a:r>
+            <a:endParaRPr lang="en-IN" sz="2800" b="1" dirty="0"/>
+          </a:p>
+        </p:txBody>
+      </p:sp>
+      <p:pic>
+        <p:nvPicPr>
+          <p:cNvPr id="4" name="Picture 3">
+            <a:extLst>
+              <a:ext uri="{FF2B5EF4-FFF2-40B4-BE49-F238E27FC236}">
+                <a16:creationId xmlns:a16="http://schemas.microsoft.com/office/drawing/2014/main" id="{4091C1B8-88AB-3BA8-0F8D-C5C0FFD7A9B7}"/>
+              </a:ext>
+            </a:extLst>
+          </p:cNvPr>
+          <p:cNvPicPr>
+            <a:picLocks noChangeAspect="1"/>
+          </p:cNvPicPr>
+          <p:nvPr/>
+        </p:nvPicPr>
+        <p:blipFill>
+          <a:blip r:embed="rId2"/>
+          <a:srcRect r="48504"/>
+          <a:stretch>
+            <a:fillRect/>
+          </a:stretch>
+        </p:blipFill>
+        <p:spPr>
+          <a:xfrm>
+            <a:off x="463640" y="856474"/>
+            <a:ext cx="10914220" cy="2321417"/>
+          </a:xfrm>
+          <a:prstGeom prst="rect">
+            <a:avLst/>
+          </a:prstGeom>
+        </p:spPr>
+      </p:pic>
+      <p:pic>
+        <p:nvPicPr>
+          <p:cNvPr id="5" name="Picture 4">
+            <a:extLst>
+              <a:ext uri="{FF2B5EF4-FFF2-40B4-BE49-F238E27FC236}">
+                <a16:creationId xmlns:a16="http://schemas.microsoft.com/office/drawing/2014/main" id="{C6C46D51-B7EE-EC87-E813-718A74CC0C8D}"/>
+              </a:ext>
+            </a:extLst>
+          </p:cNvPr>
+          <p:cNvPicPr>
+            <a:picLocks noChangeAspect="1"/>
+          </p:cNvPicPr>
+          <p:nvPr/>
+        </p:nvPicPr>
+        <p:blipFill>
+          <a:blip r:embed="rId2"/>
+          <a:srcRect l="51444"/>
+          <a:stretch>
+            <a:fillRect/>
+          </a:stretch>
+        </p:blipFill>
+        <p:spPr>
+          <a:xfrm>
+            <a:off x="573110" y="3602863"/>
+            <a:ext cx="10291085" cy="2321417"/>
+          </a:xfrm>
+          <a:prstGeom prst="rect">
+            <a:avLst/>
+          </a:prstGeom>
+        </p:spPr>
+      </p:pic>
+    </p:spTree>
+    <p:extLst>
+      <p:ext uri="{BB962C8B-B14F-4D97-AF65-F5344CB8AC3E}">
+        <p14:creationId xmlns:p14="http://schemas.microsoft.com/office/powerpoint/2010/main" val="682176169"/>
+      </p:ext>
+    </p:extLst>
+  </p:cSld>
+  <p:clrMapOvr>
+    <a:masterClrMapping/>
+  </p:clrMapOvr>
+</p:sld>
+</file>
+
+<file path=ppt/slides/slide9.xml><?xml version="1.0" encoding="utf-8"?>
+<p:sld xmlns:a="http://schemas.openxmlformats.org/drawingml/2006/main" xmlns:r="http://schemas.openxmlformats.org/officeDocument/2006/relationships" xmlns:p="http://schemas.openxmlformats.org/presentationml/2006/main">
+  <p:cSld>
+    <p:spTree>
+      <p:nvGrpSpPr>
+        <p:cNvPr id="1" name=""/>
+        <p:cNvGrpSpPr/>
+        <p:nvPr/>
+      </p:nvGrpSpPr>
+      <p:grpSpPr>
+        <a:xfrm>
+          <a:off x="0" y="0"/>
+          <a:ext cx="0" cy="0"/>
+          <a:chOff x="0" y="0"/>
+          <a:chExt cx="0" cy="0"/>
+        </a:xfrm>
+      </p:grpSpPr>
+      <p:sp>
+        <p:nvSpPr>
+          <p:cNvPr id="2" name="Title 1">
+            <a:extLst>
+              <a:ext uri="{FF2B5EF4-FFF2-40B4-BE49-F238E27FC236}">
+                <a16:creationId xmlns:a16="http://schemas.microsoft.com/office/drawing/2014/main" id="{2BF34E81-A319-97FA-BCBC-B64EFE498524}"/>
+              </a:ext>
+            </a:extLst>
+          </p:cNvPr>
+          <p:cNvSpPr txBox="1">
+            <a:spLocks/>
+          </p:cNvSpPr>
+          <p:nvPr/>
+        </p:nvSpPr>
+        <p:spPr>
+          <a:xfrm>
+            <a:off x="257576" y="83707"/>
+            <a:ext cx="11790610" cy="869329"/>
+          </a:xfrm>
+          <a:prstGeom prst="rect">
+            <a:avLst/>
+          </a:prstGeom>
+        </p:spPr>
+        <p:txBody>
+          <a:bodyPr/>
+          <a:lstStyle>
+            <a:lvl1pPr algn="l" defTabSz="914400" rtl="0" eaLnBrk="1" latinLnBrk="0" hangingPunct="1">
+              <a:lnSpc>
+                <a:spcPct val="90000"/>
+              </a:lnSpc>
+              <a:spcBef>
+                <a:spcPct val="0"/>
+              </a:spcBef>
+              <a:buNone/>
+              <a:defRPr sz="4400" kern="1200">
+                <a:solidFill>
+                  <a:schemeClr val="tx1"/>
+                </a:solidFill>
+                <a:latin typeface="+mj-lt"/>
+                <a:ea typeface="+mj-ea"/>
+                <a:cs typeface="+mj-cs"/>
+              </a:defRPr>
+            </a:lvl1pPr>
+          </a:lstStyle>
+          <a:p>
+            <a:r>
+              <a:rPr lang="en-US" sz="2800" dirty="0"/>
+              <a:t>7. Add dd pulses using stretches to idle qubits in the </a:t>
+            </a:r>
+            <a:r>
+              <a:rPr lang="en-US" sz="2800" b="1" dirty="0" err="1"/>
+              <a:t>Ifelseop</a:t>
+            </a:r>
+            <a:r>
+              <a:rPr lang="en-US" sz="2800" dirty="0"/>
+              <a:t> part </a:t>
+            </a:r>
+            <a:endParaRPr lang="en-IN" sz="2800" b="1" dirty="0"/>
+          </a:p>
+        </p:txBody>
+      </p:sp>
+      <p:pic>
+        <p:nvPicPr>
+          <p:cNvPr id="4" name="Picture 3">
+            <a:extLst>
+              <a:ext uri="{FF2B5EF4-FFF2-40B4-BE49-F238E27FC236}">
+                <a16:creationId xmlns:a16="http://schemas.microsoft.com/office/drawing/2014/main" id="{1CA724B1-85E4-CC6A-6E0E-5B89DB03E09B}"/>
+              </a:ext>
+            </a:extLst>
+          </p:cNvPr>
+          <p:cNvPicPr>
+            <a:picLocks noChangeAspect="1"/>
+          </p:cNvPicPr>
+          <p:nvPr/>
+        </p:nvPicPr>
+        <p:blipFill>
+          <a:blip r:embed="rId2"/>
+          <a:srcRect r="47289"/>
+          <a:stretch>
+            <a:fillRect/>
+          </a:stretch>
+        </p:blipFill>
+        <p:spPr>
+          <a:xfrm>
+            <a:off x="257576" y="1303349"/>
+            <a:ext cx="11778021" cy="1819775"/>
+          </a:xfrm>
+          <a:prstGeom prst="rect">
+            <a:avLst/>
+          </a:prstGeom>
+        </p:spPr>
+      </p:pic>
+      <p:pic>
+        <p:nvPicPr>
+          <p:cNvPr id="5" name="Picture 4">
+            <a:extLst>
+              <a:ext uri="{FF2B5EF4-FFF2-40B4-BE49-F238E27FC236}">
+                <a16:creationId xmlns:a16="http://schemas.microsoft.com/office/drawing/2014/main" id="{12B4E2AF-38DA-BF45-A1E1-279B5C58FEFE}"/>
+              </a:ext>
+            </a:extLst>
+          </p:cNvPr>
+          <p:cNvPicPr>
+            <a:picLocks noChangeAspect="1"/>
+          </p:cNvPicPr>
+          <p:nvPr/>
+        </p:nvPicPr>
+        <p:blipFill>
+          <a:blip r:embed="rId2"/>
+          <a:srcRect l="52570"/>
+          <a:stretch>
+            <a:fillRect/>
+          </a:stretch>
+        </p:blipFill>
+        <p:spPr>
+          <a:xfrm>
+            <a:off x="540910" y="3310308"/>
+            <a:ext cx="11510387" cy="1976468"/>
+          </a:xfrm>
+          <a:prstGeom prst="rect">
+            <a:avLst/>
+          </a:prstGeom>
+        </p:spPr>
+      </p:pic>
+    </p:spTree>
+    <p:extLst>
+      <p:ext uri="{BB962C8B-B14F-4D97-AF65-F5344CB8AC3E}">
+        <p14:creationId xmlns:p14="http://schemas.microsoft.com/office/powerpoint/2010/main" val="2597089040"/>
       </p:ext>
     </p:extLst>
   </p:cSld>
